--- a/J30/Australia_Impact/Output_files/Australia_Inbound_Flow_Business_Case.pptx
+++ b/J30/Australia_Impact/Output_files/Australia_Inbound_Flow_Business_Case.pptx
@@ -308,7 +308,7 @@
           <a:p>
             <a:fld id="{5BCAD085-E8A6-8845-BD4E-CB4CCA059FC4}" type="datetimeFigureOut">
               <a:rPr lang="en-US" smtClean="0"/>
-              <a:t>9/3/26</a:t>
+              <a:t>9/4/26</a:t>
             </a:fld>
             <a:endParaRPr lang="en-US"/>
           </a:p>
@@ -476,7 +476,7 @@
           <a:p>
             <a:fld id="{5BCAD085-E8A6-8845-BD4E-CB4CCA059FC4}" type="datetimeFigureOut">
               <a:rPr lang="en-US" smtClean="0"/>
-              <a:t>9/3/26</a:t>
+              <a:t>9/4/26</a:t>
             </a:fld>
             <a:endParaRPr lang="en-US"/>
           </a:p>
@@ -654,7 +654,7 @@
           <a:p>
             <a:fld id="{5BCAD085-E8A6-8845-BD4E-CB4CCA059FC4}" type="datetimeFigureOut">
               <a:rPr lang="en-US" smtClean="0"/>
-              <a:t>9/3/26</a:t>
+              <a:t>9/4/26</a:t>
             </a:fld>
             <a:endParaRPr lang="en-US"/>
           </a:p>
@@ -822,7 +822,7 @@
           <a:p>
             <a:fld id="{5BCAD085-E8A6-8845-BD4E-CB4CCA059FC4}" type="datetimeFigureOut">
               <a:rPr lang="en-US" smtClean="0"/>
-              <a:t>9/3/26</a:t>
+              <a:t>9/4/26</a:t>
             </a:fld>
             <a:endParaRPr lang="en-US"/>
           </a:p>
@@ -1067,7 +1067,7 @@
           <a:p>
             <a:fld id="{5BCAD085-E8A6-8845-BD4E-CB4CCA059FC4}" type="datetimeFigureOut">
               <a:rPr lang="en-US" smtClean="0"/>
-              <a:t>9/3/26</a:t>
+              <a:t>9/4/26</a:t>
             </a:fld>
             <a:endParaRPr lang="en-US"/>
           </a:p>
@@ -1352,7 +1352,7 @@
           <a:p>
             <a:fld id="{5BCAD085-E8A6-8845-BD4E-CB4CCA059FC4}" type="datetimeFigureOut">
               <a:rPr lang="en-US" smtClean="0"/>
-              <a:t>9/3/26</a:t>
+              <a:t>9/4/26</a:t>
             </a:fld>
             <a:endParaRPr lang="en-US"/>
           </a:p>
@@ -1771,7 +1771,7 @@
           <a:p>
             <a:fld id="{5BCAD085-E8A6-8845-BD4E-CB4CCA059FC4}" type="datetimeFigureOut">
               <a:rPr lang="en-US" smtClean="0"/>
-              <a:t>9/3/26</a:t>
+              <a:t>9/4/26</a:t>
             </a:fld>
             <a:endParaRPr lang="en-US"/>
           </a:p>
@@ -1888,7 +1888,7 @@
           <a:p>
             <a:fld id="{5BCAD085-E8A6-8845-BD4E-CB4CCA059FC4}" type="datetimeFigureOut">
               <a:rPr lang="en-US" smtClean="0"/>
-              <a:t>9/3/26</a:t>
+              <a:t>9/4/26</a:t>
             </a:fld>
             <a:endParaRPr lang="en-US"/>
           </a:p>
@@ -1983,7 +1983,7 @@
           <a:p>
             <a:fld id="{5BCAD085-E8A6-8845-BD4E-CB4CCA059FC4}" type="datetimeFigureOut">
               <a:rPr lang="en-US" smtClean="0"/>
-              <a:t>9/3/26</a:t>
+              <a:t>9/4/26</a:t>
             </a:fld>
             <a:endParaRPr lang="en-US"/>
           </a:p>
@@ -2258,7 +2258,7 @@
           <a:p>
             <a:fld id="{5BCAD085-E8A6-8845-BD4E-CB4CCA059FC4}" type="datetimeFigureOut">
               <a:rPr lang="en-US" smtClean="0"/>
-              <a:t>9/3/26</a:t>
+              <a:t>9/4/26</a:t>
             </a:fld>
             <a:endParaRPr lang="en-US"/>
           </a:p>
@@ -2510,7 +2510,7 @@
           <a:p>
             <a:fld id="{5BCAD085-E8A6-8845-BD4E-CB4CCA059FC4}" type="datetimeFigureOut">
               <a:rPr lang="en-US" smtClean="0"/>
-              <a:t>9/3/26</a:t>
+              <a:t>9/4/26</a:t>
             </a:fld>
             <a:endParaRPr lang="en-US"/>
           </a:p>
@@ -2721,7 +2721,7 @@
           <a:p>
             <a:fld id="{5BCAD085-E8A6-8845-BD4E-CB4CCA059FC4}" type="datetimeFigureOut">
               <a:rPr lang="en-US" smtClean="0"/>
-              <a:t>9/3/26</a:t>
+              <a:t>9/4/26</a:t>
             </a:fld>
             <a:endParaRPr lang="en-US"/>
           </a:p>
@@ -3919,6 +3919,7 @@
               </a:defRPr>
             </a:pPr>
             <a:r>
+              <a:rPr dirty="0"/>
               <a:t>Assumptions (conservative): Manual full-cycle test ~45 minutes; automated supervised run ~12 minutes; ~33 minutes saved per cycle.</a:t>
             </a:r>
           </a:p>
@@ -3973,6 +3974,7 @@
               </a:defRPr>
             </a:pPr>
             <a:r>
+              <a:rPr dirty="0"/>
               <a:t>33 min</a:t>
             </a:r>
           </a:p>
@@ -3985,6 +3987,7 @@
               </a:defRPr>
             </a:pPr>
             <a:r>
+              <a:rPr dirty="0"/>
               <a:t>Saved per cycle</a:t>
             </a:r>
           </a:p>
@@ -3997,6 +4000,7 @@
               </a:defRPr>
             </a:pPr>
             <a:r>
+              <a:rPr dirty="0"/>
               <a:t>One full inbound scenario</a:t>
             </a:r>
           </a:p>
@@ -4051,8 +4055,14 @@
               </a:defRPr>
             </a:pPr>
             <a:r>
-              <a:t>3.9 hrs</a:t>
-            </a:r>
+              <a:rPr dirty="0"/>
+              <a:t>3.9 </a:t>
+            </a:r>
+            <a:r>
+              <a:rPr dirty="0" err="1"/>
+              <a:t>hrs</a:t>
+            </a:r>
+            <a:endParaRPr dirty="0"/>
           </a:p>
           <a:p>
             <a:pPr algn="ctr">
@@ -4063,6 +4073,7 @@
               </a:defRPr>
             </a:pPr>
             <a:r>
+              <a:rPr dirty="0"/>
               <a:t>Saved per 7 test cycles</a:t>
             </a:r>
           </a:p>
@@ -4075,6 +4086,7 @@
               </a:defRPr>
             </a:pPr>
             <a:r>
+              <a:rPr dirty="0"/>
               <a:t>Typical weekly QA regression</a:t>
             </a:r>
           </a:p>
@@ -4129,8 +4141,14 @@
               </a:defRPr>
             </a:pPr>
             <a:r>
-              <a:t>~202 hrs</a:t>
-            </a:r>
+              <a:rPr dirty="0"/>
+              <a:t>~202 </a:t>
+            </a:r>
+            <a:r>
+              <a:rPr dirty="0" err="1"/>
+              <a:t>hrs</a:t>
+            </a:r>
+            <a:endParaRPr dirty="0"/>
           </a:p>
           <a:p>
             <a:pPr algn="ctr">
@@ -4141,6 +4159,7 @@
               </a:defRPr>
             </a:pPr>
             <a:r>
+              <a:rPr dirty="0"/>
               <a:t>Saved per year</a:t>
             </a:r>
           </a:p>
@@ -4153,6 +4172,7 @@
               </a:defRPr>
             </a:pPr>
             <a:r>
+              <a:rPr dirty="0"/>
               <a:t>Based on one weekly regression cadence</a:t>
             </a:r>
           </a:p>
@@ -4207,6 +4227,7 @@
               </a:defRPr>
             </a:pPr>
             <a:r>
+              <a:rPr dirty="0"/>
               <a:t>Higher</a:t>
             </a:r>
           </a:p>
@@ -4219,6 +4240,7 @@
               </a:defRPr>
             </a:pPr>
             <a:r>
+              <a:rPr dirty="0"/>
               <a:t>Defect catch consistency</a:t>
             </a:r>
           </a:p>
@@ -4231,6 +4253,7 @@
               </a:defRPr>
             </a:pPr>
             <a:r>
+              <a:rPr dirty="0"/>
               <a:t>Repeatable flow reduces human misses</a:t>
             </a:r>
           </a:p>
